--- a/Materjalid/Day15 AI/15-paev-andmetarkus-esitlus.pptx
+++ b/Materjalid/Day15 AI/15-paev-andmetarkus-esitlus.pptx
@@ -309,7 +309,7 @@
           <a:p>
             <a:fld id="{F9D2AD6E-DEDD-49A0-A4BE-7A081A9112DA}" type="datetimeFigureOut">
               <a:rPr lang="en-US" smtClean="0"/>
-              <a:t>8/27/2026</a:t>
+              <a:t>8/28/2026</a:t>
             </a:fld>
             <a:endParaRPr lang="en-US"/>
           </a:p>
@@ -485,7 +485,7 @@
           </a:lstStyle>
           <a:p>
             <a:fld id="{2AF9C1A6-4321-41FA-B001-4140F0E2457F}" type="datetimeFigureOut">
-              <a:t>27.08.2026</a:t>
+              <a:t>28.08.2026</a:t>
             </a:fld>
             <a:endParaRPr lang="en-US"/>
           </a:p>
@@ -13077,7 +13077,7 @@
           <a:p>
             <a:fld id="{DE840A40-73C8-4048-8140-49F5D65BB431}" type="datetimeFigureOut">
               <a:rPr lang="et-EE" smtClean="0"/>
-              <a:t>27.08.2026</a:t>
+              <a:t>28.08.2026</a:t>
             </a:fld>
             <a:endParaRPr lang="et-EE"/>
           </a:p>
@@ -28656,7 +28656,7 @@
             <p:ph sz="quarter" idx="10"/>
             <p:extLst>
               <p:ext uri="{D42A27DB-BD31-4B8C-83A1-F6EECF244321}">
-                <p14:modId xmlns:p14="http://schemas.microsoft.com/office/powerpoint/2010/main" val="3832999610"/>
+                <p14:modId xmlns:p14="http://schemas.microsoft.com/office/powerpoint/2010/main" val="1327165424"/>
               </p:ext>
             </p:extLst>
           </p:nvPr>
@@ -28701,25 +28701,8 @@
                           <a:effectLst/>
                           <a:latin typeface="Inter"/>
                         </a:rPr>
-                        <a:t>09:00 – 10:30 – Koolitus – </a:t>
+                        <a:t>09:00 – 10:30 – Koolitus – esineja</a:t>
                       </a:r>
-                      <a:r>
-                        <a:rPr lang="et-EE" sz="2400" b="0" i="0" u="none" strike="noStrike" noProof="0" dirty="0">
-                          <a:solidFill>
-                            <a:srgbClr val="121212"/>
-                          </a:solidFill>
-                          <a:effectLst/>
-                          <a:latin typeface="+mn-lt"/>
-                        </a:rPr>
-                        <a:t>Erki Pogoretski (Telia)</a:t>
-                      </a:r>
-                      <a:endParaRPr lang="et-EE" sz="2400" b="0" i="0" noProof="0" dirty="0">
-                        <a:solidFill>
-                          <a:srgbClr val="121212"/>
-                        </a:solidFill>
-                        <a:effectLst/>
-                        <a:latin typeface="Inter"/>
-                      </a:endParaRPr>
                     </a:p>
                   </a:txBody>
                   <a:tcPr marL="99060" marR="99060" marT="49530" marB="49530" anchor="ctr">
@@ -37228,21 +37211,6 @@
 </file>
 
 <file path=customXml/item1.xml><?xml version="1.0" encoding="utf-8"?>
-<?mso-contentType ?>
-<FormTemplates xmlns="http://schemas.microsoft.com/sharepoint/v3/contenttype/forms">
-  <Display>DocumentLibraryForm</Display>
-  <Edit>DocumentLibraryForm</Edit>
-  <New>DocumentLibraryForm</New>
-</FormTemplates>
-</file>
-
-<file path=customXml/item2.xml><?xml version="1.0" encoding="utf-8"?>
-<p:properties xmlns:p="http://schemas.microsoft.com/office/2006/metadata/properties" xmlns:xsi="http://www.w3.org/2001/XMLSchema-instance" xmlns:pc="http://schemas.microsoft.com/office/infopath/2007/PartnerControls">
-  <documentManagement/>
-</p:properties>
-</file>
-
-<file path=customXml/item3.xml><?xml version="1.0" encoding="utf-8"?>
 <ct:contentTypeSchema xmlns:ct="http://schemas.microsoft.com/office/2006/metadata/contentType" xmlns:ma="http://schemas.microsoft.com/office/2006/metadata/properties/metaAttributes" ct:_="" ma:_="" ma:contentTypeName="Document" ma:contentTypeID="0x010100C4D27B8FA8976546BCD79313C588588D" ma:contentTypeVersion="8" ma:contentTypeDescription="Create a new document." ma:contentTypeScope="" ma:versionID="a112c56f6fe148a79025c76584832af0">
   <xsd:schema xmlns:xsd="http://www.w3.org/2001/XMLSchema" xmlns:xs="http://www.w3.org/2001/XMLSchema" xmlns:p="http://schemas.microsoft.com/office/2006/metadata/properties" xmlns:ns2="a1a2d923-8fea-42f1-bd41-9cdfff65694e" targetNamespace="http://schemas.microsoft.com/office/2006/metadata/properties" ma:root="true" ma:fieldsID="97c8655d467eaa9470a714421e7268c0" ns2:_="">
     <xsd:import namespace="a1a2d923-8fea-42f1-bd41-9cdfff65694e"/>
@@ -37410,24 +37378,22 @@
 </ct:contentTypeSchema>
 </file>
 
-<file path=customXml/itemProps1.xml><?xml version="1.0" encoding="utf-8"?>
-<ds:datastoreItem xmlns:ds="http://schemas.openxmlformats.org/officeDocument/2006/customXml" ds:itemID="{9DC439CA-6F1C-4005-ACA6-A52E04DEE0A7}">
-  <ds:schemaRefs>
-    <ds:schemaRef ds:uri="http://schemas.microsoft.com/sharepoint/v3/contenttype/forms"/>
-  </ds:schemaRefs>
-</ds:datastoreItem>
+<file path=customXml/item2.xml><?xml version="1.0" encoding="utf-8"?>
+<?mso-contentType ?>
+<FormTemplates xmlns="http://schemas.microsoft.com/sharepoint/v3/contenttype/forms">
+  <Display>DocumentLibraryForm</Display>
+  <Edit>DocumentLibraryForm</Edit>
+  <New>DocumentLibraryForm</New>
+</FormTemplates>
 </file>
 
-<file path=customXml/itemProps2.xml><?xml version="1.0" encoding="utf-8"?>
-<ds:datastoreItem xmlns:ds="http://schemas.openxmlformats.org/officeDocument/2006/customXml" ds:itemID="{5BDF4908-A52A-47DD-A794-6E02D71942FC}">
-  <ds:schemaRefs>
-    <ds:schemaRef ds:uri="http://schemas.microsoft.com/office/2006/metadata/properties"/>
-    <ds:schemaRef ds:uri="http://schemas.microsoft.com/office/infopath/2007/PartnerControls"/>
-  </ds:schemaRefs>
-</ds:datastoreItem>
+<file path=customXml/item3.xml><?xml version="1.0" encoding="utf-8"?>
+<p:properties xmlns:p="http://schemas.microsoft.com/office/2006/metadata/properties" xmlns:xsi="http://www.w3.org/2001/XMLSchema-instance" xmlns:pc="http://schemas.microsoft.com/office/infopath/2007/PartnerControls">
+  <documentManagement/>
+</p:properties>
 </file>
 
-<file path=customXml/itemProps3.xml><?xml version="1.0" encoding="utf-8"?>
+<file path=customXml/itemProps1.xml><?xml version="1.0" encoding="utf-8"?>
 <ds:datastoreItem xmlns:ds="http://schemas.openxmlformats.org/officeDocument/2006/customXml" ds:itemID="{9CF4F972-2392-44D0-AA45-41AC4FDC4A59}">
   <ds:schemaRefs>
     <ds:schemaRef ds:uri="a1a2d923-8fea-42f1-bd41-9cdfff65694e"/>
@@ -37443,4 +37409,21 @@
     <ds:schemaRef ds:uri="http://www.w3.org/2001/XMLSchema"/>
   </ds:schemaRefs>
 </ds:datastoreItem>
+</file>
+
+<file path=customXml/itemProps2.xml><?xml version="1.0" encoding="utf-8"?>
+<ds:datastoreItem xmlns:ds="http://schemas.openxmlformats.org/officeDocument/2006/customXml" ds:itemID="{9DC439CA-6F1C-4005-ACA6-A52E04DEE0A7}">
+  <ds:schemaRefs>
+    <ds:schemaRef ds:uri="http://schemas.microsoft.com/sharepoint/v3/contenttype/forms"/>
+  </ds:schemaRefs>
+</ds:datastoreItem>
+</file>
+
+<file path=customXml/itemProps3.xml><?xml version="1.0" encoding="utf-8"?>
+<ds:datastoreItem xmlns:ds="http://schemas.openxmlformats.org/officeDocument/2006/customXml" ds:itemID="{5BDF4908-A52A-47DD-A794-6E02D71942FC}">
+  <ds:schemaRefs>
+    <ds:schemaRef ds:uri="http://schemas.microsoft.com/office/2006/metadata/properties"/>
+    <ds:schemaRef ds:uri="http://schemas.microsoft.com/office/infopath/2007/PartnerControls"/>
+  </ds:schemaRefs>
+</ds:datastoreItem>
 </file>